--- a/qg中期考核/项目文件/差分隐私编队控制项目复现报告.pptx
+++ b/qg中期考核/项目文件/差分隐私编队控制项目复现报告.pptx
@@ -16689,30 +16689,6 @@
           </a:p>
         </p:txBody>
       </p:sp>
-      <p:pic>
-        <p:nvPicPr>
-          <p:cNvPr id="19" name="Picture 19"/>
-          <p:cNvPicPr>
-            <a:picLocks noChangeAspect="1"/>
-          </p:cNvPicPr>
-          <p:nvPr/>
-        </p:nvPicPr>
-        <p:blipFill>
-          <a:blip r:embed="rId8"/>
-          <a:stretch>
-            <a:fillRect/>
-          </a:stretch>
-        </p:blipFill>
-        <p:spPr>
-          <a:xfrm>
-            <a:off x="10668000" y="6190112"/>
-            <a:ext cx="1524000" cy="667888"/>
-          </a:xfrm>
-          <a:prstGeom prst="rect">
-            <a:avLst/>
-          </a:prstGeom>
-        </p:spPr>
-      </p:pic>
     </p:spTree>
   </p:cSld>
   <p:clrMapOvr>
@@ -17655,20 +17631,6 @@
               </a:lnSpc>
               <a:defRPr/>
             </a:pPr>
-            <a:r>
-              <a:rPr lang="en-US" sz="1200" b="0" i="0" u="none" strike="noStrike">
-                <a:solidFill>
-                  <a:srgbClr val="FFFFFF">
-                    <a:alpha val="50196"/>
-                  </a:srgbClr>
-                </a:solidFill>
-                <a:latin typeface="Noto Sans SC" panose="020B0200000000000000" charset="-122"/>
-                <a:ea typeface="Noto Sans SC" panose="020B0200000000000000" charset="-122"/>
-                <a:cs typeface="Noto Sans SC" panose="020B0200000000000000" charset="-122"/>
-                <a:sym typeface="Noto Sans SC" panose="020B0200000000000000" charset="-122"/>
-              </a:rPr>
-              <a:t>TECHNOLOGY REPORT · 2024</a:t>
-            </a:r>
             <a:endParaRPr lang="en-US" sz="1100"/>
           </a:p>
         </p:txBody>
@@ -23174,39 +23136,6 @@
           </a:graphicData>
         </a:graphic>
       </p:graphicFrame>
-      <p:pic>
-        <p:nvPicPr>
-          <p:cNvPr id="8" name="Picture 8"/>
-          <p:cNvPicPr>
-            <a:picLocks noChangeAspect="1"/>
-          </p:cNvPicPr>
-          <p:nvPr/>
-        </p:nvPicPr>
-        <p:blipFill>
-          <a:blip r:embed="rId2">
-            <a:extLst>
-              <a:ext uri="{28A0092B-C50C-407E-A947-70E740481C1C}">
-                <a14:useLocalDpi xmlns:a14="http://schemas.microsoft.com/office/drawing/2010/main" val="0"/>
-              </a:ext>
-              <a:ext uri="{96DAC541-7B7A-43D3-8B79-37D633B846F1}">
-                <asvg:svgBlip xmlns:asvg="http://schemas.microsoft.com/office/drawing/2016/SVG/main" r:embed="rId3"/>
-              </a:ext>
-            </a:extLst>
-          </a:blip>
-          <a:stretch>
-            <a:fillRect/>
-          </a:stretch>
-        </p:blipFill>
-        <p:spPr>
-          <a:xfrm>
-            <a:off x="762000" y="5461000"/>
-            <a:ext cx="406400" cy="406400"/>
-          </a:xfrm>
-          <a:prstGeom prst="rect">
-            <a:avLst/>
-          </a:prstGeom>
-        </p:spPr>
-      </p:pic>
       <p:sp>
         <p:nvSpPr>
           <p:cNvPr id="9" name="AutoShape 9"/>
@@ -23238,20 +23167,6 @@
               </a:lnSpc>
               <a:defRPr/>
             </a:pPr>
-            <a:r>
-              <a:rPr lang="en-US" sz="1200" b="0" i="0" u="none" strike="noStrike">
-                <a:solidFill>
-                  <a:srgbClr val="FFFFFF">
-                    <a:alpha val="60000"/>
-                  </a:srgbClr>
-                </a:solidFill>
-                <a:latin typeface="Noto Sans SC" panose="020B0200000000000000" charset="-122"/>
-                <a:ea typeface="Noto Sans SC" panose="020B0200000000000000" charset="-122"/>
-                <a:cs typeface="Noto Sans SC" panose="020B0200000000000000" charset="-122"/>
-                <a:sym typeface="Noto Sans SC" panose="020B0200000000000000" charset="-122"/>
-              </a:rPr>
-              <a:t>实验环境基于 Python 仿真平台搭建，所有参数均经过多轮预实验验证，确保实验结果的可复现性与有效性。</a:t>
-            </a:r>
             <a:endParaRPr lang="en-US" sz="1100"/>
           </a:p>
         </p:txBody>
@@ -23947,7 +23862,7 @@
         </p:nvSpPr>
         <p:spPr>
           <a:xfrm>
-            <a:off x="0" y="0"/>
+            <a:off x="43815" y="0"/>
             <a:ext cx="12192000" cy="6858000"/>
           </a:xfrm>
           <a:prstGeom prst="roundRect">
@@ -24707,20 +24622,6 @@
               </a:lnSpc>
               <a:defRPr/>
             </a:pPr>
-            <a:r>
-              <a:rPr lang="en-US" sz="1200" b="0" i="0" u="none" strike="noStrike">
-                <a:solidFill>
-                  <a:srgbClr val="FFFFFF">
-                    <a:alpha val="60000"/>
-                  </a:srgbClr>
-                </a:solidFill>
-                <a:latin typeface="Noto Sans SC" panose="020B0200000000000000" charset="-122"/>
-                <a:ea typeface="Noto Sans SC" panose="020B0200000000000000" charset="-122"/>
-                <a:cs typeface="Noto Sans SC" panose="020B0200000000000000" charset="-122"/>
-                <a:sym typeface="Noto Sans SC" panose="020B0200000000000000" charset="-122"/>
-              </a:rPr>
-              <a:t>数据来源：差分隐私控制系统仿真实验报告 / 2024</a:t>
-            </a:r>
             <a:endParaRPr lang="en-US" sz="1100"/>
           </a:p>
         </p:txBody>
